--- a/outputs/manual-20260508-colorcode-team-presentation/presentations/colorcode-team-brand/output/colorcode-team-presentation-brand-slides.pptx
+++ b/outputs/manual-20260508-colorcode-team-presentation/presentations/colorcode-team-brand/output/colorcode-team-presentation-brand-slides.pptx
@@ -1173,14 +1173,61 @@
         </p:blipFill>
         <p:spPr>
           <a:xfrm>
-            <a:off x="3581877" y="1122903"/>
-            <a:ext cx="5028246" cy="5028246"/>
+            <a:off x="3921189" y="973836"/>
+            <a:ext cx="4349622" cy="4349622"/>
           </a:xfrm>
           <a:prstGeom prst="rect">
             <a:avLst/>
           </a:prstGeom>
         </p:spPr>
       </p:pic>
+      <p:sp>
+        <p:nvSpPr>
+          <p:cNvPr id="10" name="TextBox 9">
+            <a:extLst>
+              <a:ext uri="{FF2B5EF4-FFF2-40B4-BE49-F238E27FC236}">
+                <a16:creationId xmlns:a16="http://schemas.microsoft.com/office/drawing/2014/main" id="{594486BB-C021-3D11-002B-2845DA2D1F63}"/>
+              </a:ext>
+            </a:extLst>
+          </p:cNvPr>
+          <p:cNvSpPr txBox="1"/>
+          <p:nvPr/>
+        </p:nvSpPr>
+        <p:spPr>
+          <a:xfrm>
+            <a:off x="4248379" y="5155871"/>
+            <a:ext cx="3695242" cy="769441"/>
+          </a:xfrm>
+          <a:prstGeom prst="rect">
+            <a:avLst/>
+          </a:prstGeom>
+          <a:noFill/>
+        </p:spPr>
+        <p:txBody>
+          <a:bodyPr wrap="none" rtlCol="0">
+            <a:spAutoFit/>
+          </a:bodyPr>
+          <a:lstStyle/>
+          <a:p>
+            <a:r>
+              <a:rPr lang="en-GB" sz="4400" dirty="0">
+                <a:solidFill>
+                  <a:srgbClr val="18213C"/>
+                </a:solidFill>
+              </a:rPr>
+              <a:t>c</a:t>
+            </a:r>
+            <a:r>
+              <a:rPr lang="en-CH" sz="4400" dirty="0">
+                <a:solidFill>
+                  <a:srgbClr val="18213C"/>
+                </a:solidFill>
+              </a:rPr>
+              <a:t>olorcode-ai.ch</a:t>
+            </a:r>
+          </a:p>
+        </p:txBody>
+      </p:sp>
     </p:spTree>
   </p:cSld>
   <p:clrMapOvr>
